--- a/slides/APL_Bootcamp-part-9-files.pptx
+++ b/slides/APL_Bootcamp-part-9-files.pptx
@@ -273,7 +273,7 @@
               <a:rPr lang="en-GB" smtClean="0">
                 <a:latin typeface="Sarabun" panose="00000500000000000000" pitchFamily="2" charset="-34"/>
               </a:rPr>
-              <a:t>10/08/2025</a:t>
+              <a:t>15/08/2025</a:t>
             </a:fld>
             <a:endParaRPr lang="en-GB" dirty="0">
               <a:latin typeface="Sarabun" panose="00000500000000000000" pitchFamily="2" charset="-34"/>
@@ -451,7 +451,7 @@
             <a:fld id="{CDEAEF8A-5BB8-41C8-B8C2-160617C17EF4}" type="datetimeFigureOut">
               <a:rPr lang="en-GB" smtClean="0"/>
               <a:pPr/>
-              <a:t>10/08/2025</a:t>
+              <a:t>15/08/2025</a:t>
             </a:fld>
             <a:endParaRPr lang="en-GB" dirty="0"/>
           </a:p>
